--- a/templet/layouts/05_image_text.pptx
+++ b/templet/layouts/05_image_text.pptx
@@ -4,13 +4,10 @@
   <p:sldMasterIdLst>
     <p:sldMasterId id="2147483648" r:id="rId1"/>
   </p:sldMasterIdLst>
-  <p:notesMasterIdLst>
-    <p:notesMasterId r:id="rId3"/>
-  </p:notesMasterIdLst>
   <p:sldIdLst>
-    <p:sldId id="262" r:id="rId2"/>
+    <p:sldId id="260" r:id="rId11"/>
   </p:sldIdLst>
-  <p:sldSz cx="12192000" cy="6858000"/>
+  <p:sldSz cx="12192000" cy="6858000" type="screen4x3"/>
   <p:notesSz cx="6858000" cy="9144000"/>
   <p:defaultTextStyle>
     <a:defPPr>
@@ -107,456 +104,7 @@
       </a:defRPr>
     </a:lvl9pPr>
   </p:defaultTextStyle>
-  <p:extLst>
-    <p:ext uri="{EFAFB233-063F-42B5-8137-9DF3F51BA10A}">
-      <p15:sldGuideLst xmlns:p15="http://schemas.microsoft.com/office/powerpoint/2012/main">
-        <p15:guide id="1" orient="horz" pos="2160">
-          <p15:clr>
-            <a:srgbClr val="A4A3A4"/>
-          </p15:clr>
-        </p15:guide>
-        <p15:guide id="2" pos="2880">
-          <p15:clr>
-            <a:srgbClr val="A4A3A4"/>
-          </p15:clr>
-        </p15:guide>
-      </p15:sldGuideLst>
-    </p:ext>
-  </p:extLst>
 </p:presentation>
-</file>
-
-<file path=ppt/notesMasters/notesMaster1.xml><?xml version="1.0" encoding="utf-8"?>
-<p:notesMaster xmlns:a="http://schemas.openxmlformats.org/drawingml/2006/main" xmlns:r="http://schemas.openxmlformats.org/officeDocument/2006/relationships" xmlns:p="http://schemas.openxmlformats.org/presentationml/2006/main">
-  <p:cSld>
-    <p:bg>
-      <p:bgRef idx="1001">
-        <a:schemeClr val="bg1"/>
-      </p:bgRef>
-    </p:bg>
-    <p:spTree>
-      <p:nvGrpSpPr>
-        <p:cNvPr id="1" name=""/>
-        <p:cNvGrpSpPr/>
-        <p:nvPr/>
-      </p:nvGrpSpPr>
-      <p:grpSpPr>
-        <a:xfrm>
-          <a:off x="0" y="0"/>
-          <a:ext cx="0" cy="0"/>
-          <a:chOff x="0" y="0"/>
-          <a:chExt cx="0" cy="0"/>
-        </a:xfrm>
-      </p:grpSpPr>
-      <p:sp>
-        <p:nvSpPr>
-          <p:cNvPr id="2" name="머리글 개체 틀 1"/>
-          <p:cNvSpPr>
-            <a:spLocks noGrp="1"/>
-          </p:cNvSpPr>
-          <p:nvPr>
-            <p:ph type="hdr" sz="quarter"/>
-          </p:nvPr>
-        </p:nvSpPr>
-        <p:spPr>
-          <a:xfrm>
-            <a:off x="0" y="0"/>
-            <a:ext cx="2971800" cy="458788"/>
-          </a:xfrm>
-          <a:prstGeom prst="rect">
-            <a:avLst/>
-          </a:prstGeom>
-        </p:spPr>
-        <p:txBody>
-          <a:bodyPr vert="horz" lIns="91440" tIns="45720" rIns="91440" bIns="45720" rtlCol="0"/>
-          <a:lstStyle>
-            <a:lvl1pPr algn="l">
-              <a:defRPr sz="1200"/>
-            </a:lvl1pPr>
-          </a:lstStyle>
-          <a:p>
-            <a:endParaRPr lang="ko-KR" altLang="en-US"/>
-          </a:p>
-        </p:txBody>
-      </p:sp>
-      <p:sp>
-        <p:nvSpPr>
-          <p:cNvPr id="3" name="날짜 개체 틀 2"/>
-          <p:cNvSpPr>
-            <a:spLocks noGrp="1"/>
-          </p:cNvSpPr>
-          <p:nvPr>
-            <p:ph type="dt" idx="1"/>
-          </p:nvPr>
-        </p:nvSpPr>
-        <p:spPr>
-          <a:xfrm>
-            <a:off x="3884613" y="0"/>
-            <a:ext cx="2971800" cy="458788"/>
-          </a:xfrm>
-          <a:prstGeom prst="rect">
-            <a:avLst/>
-          </a:prstGeom>
-        </p:spPr>
-        <p:txBody>
-          <a:bodyPr vert="horz" lIns="91440" tIns="45720" rIns="91440" bIns="45720" rtlCol="0"/>
-          <a:lstStyle>
-            <a:lvl1pPr algn="r">
-              <a:defRPr sz="1200"/>
-            </a:lvl1pPr>
-          </a:lstStyle>
-          <a:p>
-            <a:fld id="{59EBB165-2344-4539-AB3C-05A1A1D2D529}" type="datetimeFigureOut">
-              <a:rPr lang="ko-KR" altLang="en-US" smtClean="0"/>
-              <a:t>2026-10-12</a:t>
-            </a:fld>
-            <a:endParaRPr lang="ko-KR" altLang="en-US"/>
-          </a:p>
-        </p:txBody>
-      </p:sp>
-      <p:sp>
-        <p:nvSpPr>
-          <p:cNvPr id="4" name="슬라이드 이미지 개체 틀 3"/>
-          <p:cNvSpPr>
-            <a:spLocks noGrp="1" noRot="1" noChangeAspect="1"/>
-          </p:cNvSpPr>
-          <p:nvPr>
-            <p:ph type="sldImg" idx="2"/>
-          </p:nvPr>
-        </p:nvSpPr>
-        <p:spPr>
-          <a:xfrm>
-            <a:off x="685800" y="1143000"/>
-            <a:ext cx="5486400" cy="3086100"/>
-          </a:xfrm>
-          <a:prstGeom prst="rect">
-            <a:avLst/>
-          </a:prstGeom>
-          <a:noFill/>
-          <a:ln w="12700">
-            <a:solidFill>
-              <a:prstClr val="black"/>
-            </a:solidFill>
-          </a:ln>
-        </p:spPr>
-        <p:txBody>
-          <a:bodyPr vert="horz" lIns="91440" tIns="45720" rIns="91440" bIns="45720" rtlCol="0" anchor="ctr"/>
-          <a:lstStyle/>
-          <a:p>
-            <a:endParaRPr lang="ko-KR" altLang="en-US"/>
-          </a:p>
-        </p:txBody>
-      </p:sp>
-      <p:sp>
-        <p:nvSpPr>
-          <p:cNvPr id="5" name="슬라이드 노트 개체 틀 4"/>
-          <p:cNvSpPr>
-            <a:spLocks noGrp="1"/>
-          </p:cNvSpPr>
-          <p:nvPr>
-            <p:ph type="body" sz="quarter" idx="3"/>
-          </p:nvPr>
-        </p:nvSpPr>
-        <p:spPr>
-          <a:xfrm>
-            <a:off x="685800" y="4400550"/>
-            <a:ext cx="5486400" cy="3600450"/>
-          </a:xfrm>
-          <a:prstGeom prst="rect">
-            <a:avLst/>
-          </a:prstGeom>
-        </p:spPr>
-        <p:txBody>
-          <a:bodyPr vert="horz" lIns="91440" tIns="45720" rIns="91440" bIns="45720" rtlCol="0"/>
-          <a:lstStyle/>
-          <a:p>
-            <a:pPr lvl="0"/>
-            <a:r>
-              <a:rPr lang="ko-KR" altLang="en-US"/>
-              <a:t>마스터 텍스트 스타일을 편집하려면 클릭</a:t>
-            </a:r>
-          </a:p>
-          <a:p>
-            <a:pPr lvl="1"/>
-            <a:r>
-              <a:rPr lang="ko-KR" altLang="en-US"/>
-              <a:t>두 번째 수준</a:t>
-            </a:r>
-          </a:p>
-          <a:p>
-            <a:pPr lvl="2"/>
-            <a:r>
-              <a:rPr lang="ko-KR" altLang="en-US"/>
-              <a:t>세 번째 수준</a:t>
-            </a:r>
-          </a:p>
-          <a:p>
-            <a:pPr lvl="3"/>
-            <a:r>
-              <a:rPr lang="ko-KR" altLang="en-US"/>
-              <a:t>네 번째 수준</a:t>
-            </a:r>
-          </a:p>
-          <a:p>
-            <a:pPr lvl="4"/>
-            <a:r>
-              <a:rPr lang="ko-KR" altLang="en-US"/>
-              <a:t>다섯 번째 수준</a:t>
-            </a:r>
-          </a:p>
-        </p:txBody>
-      </p:sp>
-      <p:sp>
-        <p:nvSpPr>
-          <p:cNvPr id="6" name="바닥글 개체 틀 5"/>
-          <p:cNvSpPr>
-            <a:spLocks noGrp="1"/>
-          </p:cNvSpPr>
-          <p:nvPr>
-            <p:ph type="ftr" sz="quarter" idx="4"/>
-          </p:nvPr>
-        </p:nvSpPr>
-        <p:spPr>
-          <a:xfrm>
-            <a:off x="0" y="8685213"/>
-            <a:ext cx="2971800" cy="458787"/>
-          </a:xfrm>
-          <a:prstGeom prst="rect">
-            <a:avLst/>
-          </a:prstGeom>
-        </p:spPr>
-        <p:txBody>
-          <a:bodyPr vert="horz" lIns="91440" tIns="45720" rIns="91440" bIns="45720" rtlCol="0" anchor="b"/>
-          <a:lstStyle>
-            <a:lvl1pPr algn="l">
-              <a:defRPr sz="1200"/>
-            </a:lvl1pPr>
-          </a:lstStyle>
-          <a:p>
-            <a:endParaRPr lang="ko-KR" altLang="en-US"/>
-          </a:p>
-        </p:txBody>
-      </p:sp>
-      <p:sp>
-        <p:nvSpPr>
-          <p:cNvPr id="7" name="슬라이드 번호 개체 틀 6"/>
-          <p:cNvSpPr>
-            <a:spLocks noGrp="1"/>
-          </p:cNvSpPr>
-          <p:nvPr>
-            <p:ph type="sldNum" sz="quarter" idx="5"/>
-          </p:nvPr>
-        </p:nvSpPr>
-        <p:spPr>
-          <a:xfrm>
-            <a:off x="3884613" y="8685213"/>
-            <a:ext cx="2971800" cy="458787"/>
-          </a:xfrm>
-          <a:prstGeom prst="rect">
-            <a:avLst/>
-          </a:prstGeom>
-        </p:spPr>
-        <p:txBody>
-          <a:bodyPr vert="horz" lIns="91440" tIns="45720" rIns="91440" bIns="45720" rtlCol="0" anchor="b"/>
-          <a:lstStyle>
-            <a:lvl1pPr algn="r">
-              <a:defRPr sz="1200"/>
-            </a:lvl1pPr>
-          </a:lstStyle>
-          <a:p>
-            <a:fld id="{C3AFE730-17D6-4FE5-8FAA-7862828E2FA1}" type="slidenum">
-              <a:rPr lang="ko-KR" altLang="en-US" smtClean="0"/>
-              <a:t>‹#›</a:t>
-            </a:fld>
-            <a:endParaRPr lang="ko-KR" altLang="en-US"/>
-          </a:p>
-        </p:txBody>
-      </p:sp>
-    </p:spTree>
-    <p:extLst>
-      <p:ext uri="{BB962C8B-B14F-4D97-AF65-F5344CB8AC3E}">
-        <p14:creationId xmlns:p14="http://schemas.microsoft.com/office/powerpoint/2010/main" val="4245290787"/>
-      </p:ext>
-    </p:extLst>
-  </p:cSld>
-  <p:clrMap bg1="lt1" tx1="dk1" bg2="lt2" tx2="dk2" accent1="accent1" accent2="accent2" accent3="accent3" accent4="accent4" accent5="accent5" accent6="accent6" hlink="hlink" folHlink="folHlink"/>
-  <p:notesStyle>
-    <a:lvl1pPr marL="0" algn="l" defTabSz="914400" rtl="0" eaLnBrk="1" latinLnBrk="1" hangingPunct="1">
-      <a:defRPr sz="1200" kern="1200">
-        <a:solidFill>
-          <a:schemeClr val="tx1"/>
-        </a:solidFill>
-        <a:latin typeface="+mn-lt"/>
-        <a:ea typeface="+mn-ea"/>
-        <a:cs typeface="+mn-cs"/>
-      </a:defRPr>
-    </a:lvl1pPr>
-    <a:lvl2pPr marL="457200" algn="l" defTabSz="914400" rtl="0" eaLnBrk="1" latinLnBrk="1" hangingPunct="1">
-      <a:defRPr sz="1200" kern="1200">
-        <a:solidFill>
-          <a:schemeClr val="tx1"/>
-        </a:solidFill>
-        <a:latin typeface="+mn-lt"/>
-        <a:ea typeface="+mn-ea"/>
-        <a:cs typeface="+mn-cs"/>
-      </a:defRPr>
-    </a:lvl2pPr>
-    <a:lvl3pPr marL="914400" algn="l" defTabSz="914400" rtl="0" eaLnBrk="1" latinLnBrk="1" hangingPunct="1">
-      <a:defRPr sz="1200" kern="1200">
-        <a:solidFill>
-          <a:schemeClr val="tx1"/>
-        </a:solidFill>
-        <a:latin typeface="+mn-lt"/>
-        <a:ea typeface="+mn-ea"/>
-        <a:cs typeface="+mn-cs"/>
-      </a:defRPr>
-    </a:lvl3pPr>
-    <a:lvl4pPr marL="1371600" algn="l" defTabSz="914400" rtl="0" eaLnBrk="1" latinLnBrk="1" hangingPunct="1">
-      <a:defRPr sz="1200" kern="1200">
-        <a:solidFill>
-          <a:schemeClr val="tx1"/>
-        </a:solidFill>
-        <a:latin typeface="+mn-lt"/>
-        <a:ea typeface="+mn-ea"/>
-        <a:cs typeface="+mn-cs"/>
-      </a:defRPr>
-    </a:lvl4pPr>
-    <a:lvl5pPr marL="1828800" algn="l" defTabSz="914400" rtl="0" eaLnBrk="1" latinLnBrk="1" hangingPunct="1">
-      <a:defRPr sz="1200" kern="1200">
-        <a:solidFill>
-          <a:schemeClr val="tx1"/>
-        </a:solidFill>
-        <a:latin typeface="+mn-lt"/>
-        <a:ea typeface="+mn-ea"/>
-        <a:cs typeface="+mn-cs"/>
-      </a:defRPr>
-    </a:lvl5pPr>
-    <a:lvl6pPr marL="2286000" algn="l" defTabSz="914400" rtl="0" eaLnBrk="1" latinLnBrk="1" hangingPunct="1">
-      <a:defRPr sz="1200" kern="1200">
-        <a:solidFill>
-          <a:schemeClr val="tx1"/>
-        </a:solidFill>
-        <a:latin typeface="+mn-lt"/>
-        <a:ea typeface="+mn-ea"/>
-        <a:cs typeface="+mn-cs"/>
-      </a:defRPr>
-    </a:lvl6pPr>
-    <a:lvl7pPr marL="2743200" algn="l" defTabSz="914400" rtl="0" eaLnBrk="1" latinLnBrk="1" hangingPunct="1">
-      <a:defRPr sz="1200" kern="1200">
-        <a:solidFill>
-          <a:schemeClr val="tx1"/>
-        </a:solidFill>
-        <a:latin typeface="+mn-lt"/>
-        <a:ea typeface="+mn-ea"/>
-        <a:cs typeface="+mn-cs"/>
-      </a:defRPr>
-    </a:lvl7pPr>
-    <a:lvl8pPr marL="3200400" algn="l" defTabSz="914400" rtl="0" eaLnBrk="1" latinLnBrk="1" hangingPunct="1">
-      <a:defRPr sz="1200" kern="1200">
-        <a:solidFill>
-          <a:schemeClr val="tx1"/>
-        </a:solidFill>
-        <a:latin typeface="+mn-lt"/>
-        <a:ea typeface="+mn-ea"/>
-        <a:cs typeface="+mn-cs"/>
-      </a:defRPr>
-    </a:lvl8pPr>
-    <a:lvl9pPr marL="3657600" algn="l" defTabSz="914400" rtl="0" eaLnBrk="1" latinLnBrk="1" hangingPunct="1">
-      <a:defRPr sz="1200" kern="1200">
-        <a:solidFill>
-          <a:schemeClr val="tx1"/>
-        </a:solidFill>
-        <a:latin typeface="+mn-lt"/>
-        <a:ea typeface="+mn-ea"/>
-        <a:cs typeface="+mn-cs"/>
-      </a:defRPr>
-    </a:lvl9pPr>
-  </p:notesStyle>
-</p:notesMaster>
-</file>
-
-<file path=ppt/notesSlides/notesSlide1.xml><?xml version="1.0" encoding="utf-8"?>
-<p:notes xmlns:a="http://schemas.openxmlformats.org/drawingml/2006/main" xmlns:r="http://schemas.openxmlformats.org/officeDocument/2006/relationships" xmlns:p="http://schemas.openxmlformats.org/presentationml/2006/main">
-  <p:cSld>
-    <p:spTree>
-      <p:nvGrpSpPr>
-        <p:cNvPr id="1" name=""/>
-        <p:cNvGrpSpPr/>
-        <p:nvPr/>
-      </p:nvGrpSpPr>
-      <p:grpSpPr>
-        <a:xfrm>
-          <a:off x="0" y="0"/>
-          <a:ext cx="0" cy="0"/>
-          <a:chOff x="0" y="0"/>
-          <a:chExt cx="0" cy="0"/>
-        </a:xfrm>
-      </p:grpSpPr>
-      <p:sp>
-        <p:nvSpPr>
-          <p:cNvPr id="2" name="슬라이드 이미지 개체 틀 1"/>
-          <p:cNvSpPr>
-            <a:spLocks noGrp="1" noRot="1" noChangeAspect="1"/>
-          </p:cNvSpPr>
-          <p:nvPr>
-            <p:ph type="sldImg"/>
-          </p:nvPr>
-        </p:nvSpPr>
-        <p:spPr/>
-      </p:sp>
-      <p:sp>
-        <p:nvSpPr>
-          <p:cNvPr id="3" name="슬라이드 노트 개체 틀 2"/>
-          <p:cNvSpPr>
-            <a:spLocks noGrp="1"/>
-          </p:cNvSpPr>
-          <p:nvPr>
-            <p:ph type="body" idx="1"/>
-          </p:nvPr>
-        </p:nvSpPr>
-        <p:spPr/>
-        <p:txBody>
-          <a:bodyPr/>
-          <a:lstStyle/>
-          <a:p>
-            <a:endParaRPr lang="ko-KR" altLang="en-US"/>
-          </a:p>
-        </p:txBody>
-      </p:sp>
-      <p:sp>
-        <p:nvSpPr>
-          <p:cNvPr id="4" name="슬라이드 번호 개체 틀 3"/>
-          <p:cNvSpPr>
-            <a:spLocks noGrp="1"/>
-          </p:cNvSpPr>
-          <p:nvPr>
-            <p:ph type="sldNum" sz="quarter" idx="5"/>
-          </p:nvPr>
-        </p:nvSpPr>
-        <p:spPr/>
-        <p:txBody>
-          <a:bodyPr/>
-          <a:lstStyle/>
-          <a:p>
-            <a:fld id="{C3AFE730-17D6-4FE5-8FAA-7862828E2FA1}" type="slidenum">
-              <a:rPr lang="ko-KR" altLang="en-US" smtClean="0"/>
-              <a:t>1</a:t>
-            </a:fld>
-            <a:endParaRPr lang="ko-KR" altLang="en-US"/>
-          </a:p>
-        </p:txBody>
-      </p:sp>
-    </p:spTree>
-    <p:extLst>
-      <p:ext uri="{BB962C8B-B14F-4D97-AF65-F5344CB8AC3E}">
-        <p14:creationId xmlns:p14="http://schemas.microsoft.com/office/powerpoint/2010/main" val="3799122972"/>
-      </p:ext>
-    </p:extLst>
-  </p:cSld>
-  <p:clrMapOvr>
-    <a:masterClrMapping/>
-  </p:clrMapOvr>
-</p:notes>
 </file>
 
 <file path=ppt/slideLayouts/slideLayout1.xml><?xml version="1.0" encoding="utf-8"?>
@@ -597,9 +145,10 @@
           <a:lstStyle/>
           <a:p>
             <a:r>
-              <a:rPr lang="en-US"/>
+              <a:rPr lang="en-US" smtClean="0"/>
               <a:t>Click to edit Master title style</a:t>
             </a:r>
+            <a:endParaRPr lang="en-US"/>
           </a:p>
         </p:txBody>
       </p:sp>
@@ -715,9 +264,10 @@
           </a:lstStyle>
           <a:p>
             <a:r>
-              <a:rPr lang="en-US"/>
+              <a:rPr lang="en-US" smtClean="0"/>
               <a:t>Click to edit Master subtitle style</a:t>
             </a:r>
+            <a:endParaRPr lang="en-US"/>
           </a:p>
         </p:txBody>
       </p:sp>
@@ -738,7 +288,7 @@
           <a:p>
             <a:fld id="{5BCAD085-E8A6-8845-BD4E-CB4CCA059FC4}" type="datetimeFigureOut">
               <a:rPr lang="en-US" smtClean="0"/>
-              <a:t>10/12/2026</a:t>
+              <a:t>1/27/13</a:t>
             </a:fld>
             <a:endParaRPr lang="en-US"/>
           </a:p>
@@ -832,9 +382,10 @@
           <a:lstStyle/>
           <a:p>
             <a:r>
-              <a:rPr lang="en-US"/>
+              <a:rPr lang="en-US" smtClean="0"/>
               <a:t>Click to edit Master title style</a:t>
             </a:r>
+            <a:endParaRPr lang="en-US"/>
           </a:p>
         </p:txBody>
       </p:sp>
@@ -855,37 +406,38 @@
           <a:p>
             <a:pPr lvl="0"/>
             <a:r>
-              <a:rPr lang="en-US"/>
+              <a:rPr lang="en-US" smtClean="0"/>
               <a:t>Click to edit Master text styles</a:t>
             </a:r>
           </a:p>
           <a:p>
             <a:pPr lvl="1"/>
             <a:r>
-              <a:rPr lang="en-US"/>
+              <a:rPr lang="en-US" smtClean="0"/>
               <a:t>Second level</a:t>
             </a:r>
           </a:p>
           <a:p>
             <a:pPr lvl="2"/>
             <a:r>
-              <a:rPr lang="en-US"/>
+              <a:rPr lang="en-US" smtClean="0"/>
               <a:t>Third level</a:t>
             </a:r>
           </a:p>
           <a:p>
             <a:pPr lvl="3"/>
             <a:r>
-              <a:rPr lang="en-US"/>
+              <a:rPr lang="en-US" smtClean="0"/>
               <a:t>Fourth level</a:t>
             </a:r>
           </a:p>
           <a:p>
             <a:pPr lvl="4"/>
             <a:r>
-              <a:rPr lang="en-US"/>
+              <a:rPr lang="en-US" smtClean="0"/>
               <a:t>Fifth level</a:t>
             </a:r>
+            <a:endParaRPr lang="en-US"/>
           </a:p>
         </p:txBody>
       </p:sp>
@@ -906,7 +458,7 @@
           <a:p>
             <a:fld id="{5BCAD085-E8A6-8845-BD4E-CB4CCA059FC4}" type="datetimeFigureOut">
               <a:rPr lang="en-US" smtClean="0"/>
-              <a:t>10/12/2026</a:t>
+              <a:t>1/27/13</a:t>
             </a:fld>
             <a:endParaRPr lang="en-US"/>
           </a:p>
@@ -1005,9 +557,10 @@
           <a:lstStyle/>
           <a:p>
             <a:r>
-              <a:rPr lang="en-US"/>
+              <a:rPr lang="en-US" smtClean="0"/>
               <a:t>Click to edit Master title style</a:t>
             </a:r>
+            <a:endParaRPr lang="en-US"/>
           </a:p>
         </p:txBody>
       </p:sp>
@@ -1033,37 +586,38 @@
           <a:p>
             <a:pPr lvl="0"/>
             <a:r>
-              <a:rPr lang="en-US"/>
+              <a:rPr lang="en-US" smtClean="0"/>
               <a:t>Click to edit Master text styles</a:t>
             </a:r>
           </a:p>
           <a:p>
             <a:pPr lvl="1"/>
             <a:r>
-              <a:rPr lang="en-US"/>
+              <a:rPr lang="en-US" smtClean="0"/>
               <a:t>Second level</a:t>
             </a:r>
           </a:p>
           <a:p>
             <a:pPr lvl="2"/>
             <a:r>
-              <a:rPr lang="en-US"/>
+              <a:rPr lang="en-US" smtClean="0"/>
               <a:t>Third level</a:t>
             </a:r>
           </a:p>
           <a:p>
             <a:pPr lvl="3"/>
             <a:r>
-              <a:rPr lang="en-US"/>
+              <a:rPr lang="en-US" smtClean="0"/>
               <a:t>Fourth level</a:t>
             </a:r>
           </a:p>
           <a:p>
             <a:pPr lvl="4"/>
             <a:r>
-              <a:rPr lang="en-US"/>
+              <a:rPr lang="en-US" smtClean="0"/>
               <a:t>Fifth level</a:t>
             </a:r>
+            <a:endParaRPr lang="en-US"/>
           </a:p>
         </p:txBody>
       </p:sp>
@@ -1084,7 +638,7 @@
           <a:p>
             <a:fld id="{5BCAD085-E8A6-8845-BD4E-CB4CCA059FC4}" type="datetimeFigureOut">
               <a:rPr lang="en-US" smtClean="0"/>
-              <a:t>10/12/2026</a:t>
+              <a:t>1/27/13</a:t>
             </a:fld>
             <a:endParaRPr lang="en-US"/>
           </a:p>
@@ -1178,9 +732,10 @@
           <a:lstStyle/>
           <a:p>
             <a:r>
-              <a:rPr lang="en-US"/>
+              <a:rPr lang="en-US" smtClean="0"/>
               <a:t>Click to edit Master title style</a:t>
             </a:r>
+            <a:endParaRPr lang="en-US"/>
           </a:p>
         </p:txBody>
       </p:sp>
@@ -1201,37 +756,38 @@
           <a:p>
             <a:pPr lvl="0"/>
             <a:r>
-              <a:rPr lang="en-US"/>
+              <a:rPr lang="en-US" smtClean="0"/>
               <a:t>Click to edit Master text styles</a:t>
             </a:r>
           </a:p>
           <a:p>
             <a:pPr lvl="1"/>
             <a:r>
-              <a:rPr lang="en-US"/>
+              <a:rPr lang="en-US" smtClean="0"/>
               <a:t>Second level</a:t>
             </a:r>
           </a:p>
           <a:p>
             <a:pPr lvl="2"/>
             <a:r>
-              <a:rPr lang="en-US"/>
+              <a:rPr lang="en-US" smtClean="0"/>
               <a:t>Third level</a:t>
             </a:r>
           </a:p>
           <a:p>
             <a:pPr lvl="3"/>
             <a:r>
-              <a:rPr lang="en-US"/>
+              <a:rPr lang="en-US" smtClean="0"/>
               <a:t>Fourth level</a:t>
             </a:r>
           </a:p>
           <a:p>
             <a:pPr lvl="4"/>
             <a:r>
-              <a:rPr lang="en-US"/>
+              <a:rPr lang="en-US" smtClean="0"/>
               <a:t>Fifth level</a:t>
             </a:r>
+            <a:endParaRPr lang="en-US"/>
           </a:p>
         </p:txBody>
       </p:sp>
@@ -1252,7 +808,7 @@
           <a:p>
             <a:fld id="{5BCAD085-E8A6-8845-BD4E-CB4CCA059FC4}" type="datetimeFigureOut">
               <a:rPr lang="en-US" smtClean="0"/>
-              <a:t>10/12/2026</a:t>
+              <a:t>1/27/13</a:t>
             </a:fld>
             <a:endParaRPr lang="en-US"/>
           </a:p>
@@ -1355,9 +911,10 @@
           </a:lstStyle>
           <a:p>
             <a:r>
-              <a:rPr lang="en-US"/>
+              <a:rPr lang="en-US" smtClean="0"/>
               <a:t>Click to edit Master title style</a:t>
             </a:r>
+            <a:endParaRPr lang="en-US"/>
           </a:p>
         </p:txBody>
       </p:sp>
@@ -1474,7 +1031,7 @@
           <a:p>
             <a:pPr lvl="0"/>
             <a:r>
-              <a:rPr lang="en-US"/>
+              <a:rPr lang="en-US" smtClean="0"/>
               <a:t>Click to edit Master text styles</a:t>
             </a:r>
           </a:p>
@@ -1497,7 +1054,7 @@
           <a:p>
             <a:fld id="{5BCAD085-E8A6-8845-BD4E-CB4CCA059FC4}" type="datetimeFigureOut">
               <a:rPr lang="en-US" smtClean="0"/>
-              <a:t>10/12/2026</a:t>
+              <a:t>1/27/13</a:t>
             </a:fld>
             <a:endParaRPr lang="en-US"/>
           </a:p>
@@ -1591,9 +1148,10 @@
           <a:lstStyle/>
           <a:p>
             <a:r>
-              <a:rPr lang="en-US"/>
+              <a:rPr lang="en-US" smtClean="0"/>
               <a:t>Click to edit Master title style</a:t>
             </a:r>
+            <a:endParaRPr lang="en-US"/>
           </a:p>
         </p:txBody>
       </p:sp>
@@ -1647,37 +1205,38 @@
           <a:p>
             <a:pPr lvl="0"/>
             <a:r>
-              <a:rPr lang="en-US"/>
+              <a:rPr lang="en-US" smtClean="0"/>
               <a:t>Click to edit Master text styles</a:t>
             </a:r>
           </a:p>
           <a:p>
             <a:pPr lvl="1"/>
             <a:r>
-              <a:rPr lang="en-US"/>
+              <a:rPr lang="en-US" smtClean="0"/>
               <a:t>Second level</a:t>
             </a:r>
           </a:p>
           <a:p>
             <a:pPr lvl="2"/>
             <a:r>
-              <a:rPr lang="en-US"/>
+              <a:rPr lang="en-US" smtClean="0"/>
               <a:t>Third level</a:t>
             </a:r>
           </a:p>
           <a:p>
             <a:pPr lvl="3"/>
             <a:r>
-              <a:rPr lang="en-US"/>
+              <a:rPr lang="en-US" smtClean="0"/>
               <a:t>Fourth level</a:t>
             </a:r>
           </a:p>
           <a:p>
             <a:pPr lvl="4"/>
             <a:r>
-              <a:rPr lang="en-US"/>
+              <a:rPr lang="en-US" smtClean="0"/>
               <a:t>Fifth level</a:t>
             </a:r>
+            <a:endParaRPr lang="en-US"/>
           </a:p>
         </p:txBody>
       </p:sp>
@@ -1731,37 +1290,38 @@
           <a:p>
             <a:pPr lvl="0"/>
             <a:r>
-              <a:rPr lang="en-US"/>
+              <a:rPr lang="en-US" smtClean="0"/>
               <a:t>Click to edit Master text styles</a:t>
             </a:r>
           </a:p>
           <a:p>
             <a:pPr lvl="1"/>
             <a:r>
-              <a:rPr lang="en-US"/>
+              <a:rPr lang="en-US" smtClean="0"/>
               <a:t>Second level</a:t>
             </a:r>
           </a:p>
           <a:p>
             <a:pPr lvl="2"/>
             <a:r>
-              <a:rPr lang="en-US"/>
+              <a:rPr lang="en-US" smtClean="0"/>
               <a:t>Third level</a:t>
             </a:r>
           </a:p>
           <a:p>
             <a:pPr lvl="3"/>
             <a:r>
-              <a:rPr lang="en-US"/>
+              <a:rPr lang="en-US" smtClean="0"/>
               <a:t>Fourth level</a:t>
             </a:r>
           </a:p>
           <a:p>
             <a:pPr lvl="4"/>
             <a:r>
-              <a:rPr lang="en-US"/>
+              <a:rPr lang="en-US" smtClean="0"/>
               <a:t>Fifth level</a:t>
             </a:r>
+            <a:endParaRPr lang="en-US"/>
           </a:p>
         </p:txBody>
       </p:sp>
@@ -1782,7 +1342,7 @@
           <a:p>
             <a:fld id="{5BCAD085-E8A6-8845-BD4E-CB4CCA059FC4}" type="datetimeFigureOut">
               <a:rPr lang="en-US" smtClean="0"/>
-              <a:t>10/12/2026</a:t>
+              <a:t>1/27/13</a:t>
             </a:fld>
             <a:endParaRPr lang="en-US"/>
           </a:p>
@@ -1880,9 +1440,10 @@
           </a:lstStyle>
           <a:p>
             <a:r>
-              <a:rPr lang="en-US"/>
+              <a:rPr lang="en-US" smtClean="0"/>
               <a:t>Click to edit Master title style</a:t>
             </a:r>
+            <a:endParaRPr lang="en-US"/>
           </a:p>
         </p:txBody>
       </p:sp>
@@ -1945,7 +1506,7 @@
           <a:p>
             <a:pPr lvl="0"/>
             <a:r>
-              <a:rPr lang="en-US"/>
+              <a:rPr lang="en-US" smtClean="0"/>
               <a:t>Click to edit Master text styles</a:t>
             </a:r>
           </a:p>
@@ -2001,37 +1562,38 @@
           <a:p>
             <a:pPr lvl="0"/>
             <a:r>
-              <a:rPr lang="en-US"/>
+              <a:rPr lang="en-US" smtClean="0"/>
               <a:t>Click to edit Master text styles</a:t>
             </a:r>
           </a:p>
           <a:p>
             <a:pPr lvl="1"/>
             <a:r>
-              <a:rPr lang="en-US"/>
+              <a:rPr lang="en-US" smtClean="0"/>
               <a:t>Second level</a:t>
             </a:r>
           </a:p>
           <a:p>
             <a:pPr lvl="2"/>
             <a:r>
-              <a:rPr lang="en-US"/>
+              <a:rPr lang="en-US" smtClean="0"/>
               <a:t>Third level</a:t>
             </a:r>
           </a:p>
           <a:p>
             <a:pPr lvl="3"/>
             <a:r>
-              <a:rPr lang="en-US"/>
+              <a:rPr lang="en-US" smtClean="0"/>
               <a:t>Fourth level</a:t>
             </a:r>
           </a:p>
           <a:p>
             <a:pPr lvl="4"/>
             <a:r>
-              <a:rPr lang="en-US"/>
+              <a:rPr lang="en-US" smtClean="0"/>
               <a:t>Fifth level</a:t>
             </a:r>
+            <a:endParaRPr lang="en-US"/>
           </a:p>
         </p:txBody>
       </p:sp>
@@ -2094,7 +1656,7 @@
           <a:p>
             <a:pPr lvl="0"/>
             <a:r>
-              <a:rPr lang="en-US"/>
+              <a:rPr lang="en-US" smtClean="0"/>
               <a:t>Click to edit Master text styles</a:t>
             </a:r>
           </a:p>
@@ -2150,37 +1712,38 @@
           <a:p>
             <a:pPr lvl="0"/>
             <a:r>
-              <a:rPr lang="en-US"/>
+              <a:rPr lang="en-US" smtClean="0"/>
               <a:t>Click to edit Master text styles</a:t>
             </a:r>
           </a:p>
           <a:p>
             <a:pPr lvl="1"/>
             <a:r>
-              <a:rPr lang="en-US"/>
+              <a:rPr lang="en-US" smtClean="0"/>
               <a:t>Second level</a:t>
             </a:r>
           </a:p>
           <a:p>
             <a:pPr lvl="2"/>
             <a:r>
-              <a:rPr lang="en-US"/>
+              <a:rPr lang="en-US" smtClean="0"/>
               <a:t>Third level</a:t>
             </a:r>
           </a:p>
           <a:p>
             <a:pPr lvl="3"/>
             <a:r>
-              <a:rPr lang="en-US"/>
+              <a:rPr lang="en-US" smtClean="0"/>
               <a:t>Fourth level</a:t>
             </a:r>
           </a:p>
           <a:p>
             <a:pPr lvl="4"/>
             <a:r>
-              <a:rPr lang="en-US"/>
+              <a:rPr lang="en-US" smtClean="0"/>
               <a:t>Fifth level</a:t>
             </a:r>
+            <a:endParaRPr lang="en-US"/>
           </a:p>
         </p:txBody>
       </p:sp>
@@ -2201,7 +1764,7 @@
           <a:p>
             <a:fld id="{5BCAD085-E8A6-8845-BD4E-CB4CCA059FC4}" type="datetimeFigureOut">
               <a:rPr lang="en-US" smtClean="0"/>
-              <a:t>10/12/2026</a:t>
+              <a:t>1/27/13</a:t>
             </a:fld>
             <a:endParaRPr lang="en-US"/>
           </a:p>
@@ -2295,9 +1858,10 @@
           <a:lstStyle/>
           <a:p>
             <a:r>
-              <a:rPr lang="en-US"/>
+              <a:rPr lang="en-US" smtClean="0"/>
               <a:t>Click to edit Master title style</a:t>
             </a:r>
+            <a:endParaRPr lang="en-US"/>
           </a:p>
         </p:txBody>
       </p:sp>
@@ -2318,7 +1882,7 @@
           <a:p>
             <a:fld id="{5BCAD085-E8A6-8845-BD4E-CB4CCA059FC4}" type="datetimeFigureOut">
               <a:rPr lang="en-US" smtClean="0"/>
-              <a:t>10/12/2026</a:t>
+              <a:t>1/27/13</a:t>
             </a:fld>
             <a:endParaRPr lang="en-US"/>
           </a:p>
@@ -2413,7 +1977,7 @@
           <a:p>
             <a:fld id="{5BCAD085-E8A6-8845-BD4E-CB4CCA059FC4}" type="datetimeFigureOut">
               <a:rPr lang="en-US" smtClean="0"/>
-              <a:t>10/12/2026</a:t>
+              <a:t>1/27/13</a:t>
             </a:fld>
             <a:endParaRPr lang="en-US"/>
           </a:p>
@@ -2516,9 +2080,10 @@
           </a:lstStyle>
           <a:p>
             <a:r>
-              <a:rPr lang="en-US"/>
+              <a:rPr lang="en-US" smtClean="0"/>
               <a:t>Click to edit Master title style</a:t>
             </a:r>
+            <a:endParaRPr lang="en-US"/>
           </a:p>
         </p:txBody>
       </p:sp>
@@ -2572,37 +2137,38 @@
           <a:p>
             <a:pPr lvl="0"/>
             <a:r>
-              <a:rPr lang="en-US"/>
+              <a:rPr lang="en-US" smtClean="0"/>
               <a:t>Click to edit Master text styles</a:t>
             </a:r>
           </a:p>
           <a:p>
             <a:pPr lvl="1"/>
             <a:r>
-              <a:rPr lang="en-US"/>
+              <a:rPr lang="en-US" smtClean="0"/>
               <a:t>Second level</a:t>
             </a:r>
           </a:p>
           <a:p>
             <a:pPr lvl="2"/>
             <a:r>
-              <a:rPr lang="en-US"/>
+              <a:rPr lang="en-US" smtClean="0"/>
               <a:t>Third level</a:t>
             </a:r>
           </a:p>
           <a:p>
             <a:pPr lvl="3"/>
             <a:r>
-              <a:rPr lang="en-US"/>
+              <a:rPr lang="en-US" smtClean="0"/>
               <a:t>Fourth level</a:t>
             </a:r>
           </a:p>
           <a:p>
             <a:pPr lvl="4"/>
             <a:r>
-              <a:rPr lang="en-US"/>
+              <a:rPr lang="en-US" smtClean="0"/>
               <a:t>Fifth level</a:t>
             </a:r>
+            <a:endParaRPr lang="en-US"/>
           </a:p>
         </p:txBody>
       </p:sp>
@@ -2665,7 +2231,7 @@
           <a:p>
             <a:pPr lvl="0"/>
             <a:r>
-              <a:rPr lang="en-US"/>
+              <a:rPr lang="en-US" smtClean="0"/>
               <a:t>Click to edit Master text styles</a:t>
             </a:r>
           </a:p>
@@ -2688,7 +2254,7 @@
           <a:p>
             <a:fld id="{5BCAD085-E8A6-8845-BD4E-CB4CCA059FC4}" type="datetimeFigureOut">
               <a:rPr lang="en-US" smtClean="0"/>
-              <a:t>10/12/2026</a:t>
+              <a:t>1/27/13</a:t>
             </a:fld>
             <a:endParaRPr lang="en-US"/>
           </a:p>
@@ -2791,9 +2357,10 @@
           </a:lstStyle>
           <a:p>
             <a:r>
-              <a:rPr lang="en-US"/>
+              <a:rPr lang="en-US" smtClean="0"/>
               <a:t>Click to edit Master title style</a:t>
             </a:r>
+            <a:endParaRPr lang="en-US"/>
           </a:p>
         </p:txBody>
       </p:sp>
@@ -2917,7 +2484,7 @@
           <a:p>
             <a:pPr lvl="0"/>
             <a:r>
-              <a:rPr lang="en-US"/>
+              <a:rPr lang="en-US" smtClean="0"/>
               <a:t>Click to edit Master text styles</a:t>
             </a:r>
           </a:p>
@@ -2940,7 +2507,7 @@
           <a:p>
             <a:fld id="{5BCAD085-E8A6-8845-BD4E-CB4CCA059FC4}" type="datetimeFigureOut">
               <a:rPr lang="en-US" smtClean="0"/>
-              <a:t>10/12/2026</a:t>
+              <a:t>1/27/13</a:t>
             </a:fld>
             <a:endParaRPr lang="en-US"/>
           </a:p>
@@ -3049,9 +2616,10 @@
           <a:lstStyle/>
           <a:p>
             <a:r>
-              <a:rPr lang="en-US"/>
+              <a:rPr lang="en-US" smtClean="0"/>
               <a:t>Click to edit Master title style</a:t>
             </a:r>
+            <a:endParaRPr lang="en-US"/>
           </a:p>
         </p:txBody>
       </p:sp>
@@ -3082,37 +2650,38 @@
           <a:p>
             <a:pPr lvl="0"/>
             <a:r>
-              <a:rPr lang="en-US"/>
+              <a:rPr lang="en-US" smtClean="0"/>
               <a:t>Click to edit Master text styles</a:t>
             </a:r>
           </a:p>
           <a:p>
             <a:pPr lvl="1"/>
             <a:r>
-              <a:rPr lang="en-US"/>
+              <a:rPr lang="en-US" smtClean="0"/>
               <a:t>Second level</a:t>
             </a:r>
           </a:p>
           <a:p>
             <a:pPr lvl="2"/>
             <a:r>
-              <a:rPr lang="en-US"/>
+              <a:rPr lang="en-US" smtClean="0"/>
               <a:t>Third level</a:t>
             </a:r>
           </a:p>
           <a:p>
             <a:pPr lvl="3"/>
             <a:r>
-              <a:rPr lang="en-US"/>
+              <a:rPr lang="en-US" smtClean="0"/>
               <a:t>Fourth level</a:t>
             </a:r>
           </a:p>
           <a:p>
             <a:pPr lvl="4"/>
             <a:r>
-              <a:rPr lang="en-US"/>
+              <a:rPr lang="en-US" smtClean="0"/>
               <a:t>Fifth level</a:t>
             </a:r>
+            <a:endParaRPr lang="en-US"/>
           </a:p>
         </p:txBody>
       </p:sp>
@@ -3151,7 +2720,7 @@
           <a:p>
             <a:fld id="{5BCAD085-E8A6-8845-BD4E-CB4CCA059FC4}" type="datetimeFigureOut">
               <a:rPr lang="en-US" smtClean="0"/>
-              <a:t>10/12/2026</a:t>
+              <a:t>1/27/13</a:t>
             </a:fld>
             <a:endParaRPr lang="en-US"/>
           </a:p>
@@ -3509,8 +3078,8 @@
 </p:sldMaster>
 </file>
 
-<file path=ppt/slides/slide1.xml><?xml version="1.0" encoding="utf-8"?>
-<p:sld xmlns:a="http://schemas.openxmlformats.org/drawingml/2006/main" xmlns:r="http://schemas.openxmlformats.org/officeDocument/2006/relationships" xmlns:p="http://schemas.openxmlformats.org/presentationml/2006/main">
+<file path=ppt/slides/slide5.xml><?xml version="1.0" encoding="utf-8"?>
+<p:sld xmlns:a="http://schemas.openxmlformats.org/drawingml/2006/main" xmlns:p="http://schemas.openxmlformats.org/presentationml/2006/main" xmlns:r="http://schemas.openxmlformats.org/officeDocument/2006/relationships">
   <p:cSld>
     <p:spTree>
       <p:nvGrpSpPr>
@@ -3518,24 +3087,17 @@
         <p:cNvGrpSpPr/>
         <p:nvPr/>
       </p:nvGrpSpPr>
-      <p:grpSpPr>
-        <a:xfrm>
-          <a:off x="0" y="0"/>
-          <a:ext cx="0" cy="0"/>
-          <a:chOff x="0" y="0"/>
-          <a:chExt cx="0" cy="0"/>
-        </a:xfrm>
-      </p:grpSpPr>
-      <p:sp>
-        <p:nvSpPr>
-          <p:cNvPr id="2" name="Rectangle 1"/>
+      <p:grpSpPr/>
+      <p:sp>
+        <p:nvSpPr>
+          <p:cNvPr id="2" name="Header"/>
           <p:cNvSpPr/>
           <p:nvPr/>
         </p:nvSpPr>
         <p:spPr>
           <a:xfrm>
             <a:off x="0" y="0"/>
-            <a:ext cx="12192000" cy="1193800"/>
+            <a:ext cx="12192000" cy="781050"/>
           </a:xfrm>
           <a:prstGeom prst="rect">
             <a:avLst/>
@@ -3546,6 +3108,13 @@
           <a:ln>
             <a:noFill/>
           </a:ln>
+          <a:effectLst>
+            <a:outerShdw blurRad="38100" dist="19050" dir="5400000" algn="ctr" rotWithShape="0">
+              <a:srgbClr val="000000">
+                <a:alpha val="33000"/>
+              </a:srgbClr>
+            </a:outerShdw>
+          </a:effectLst>
         </p:spPr>
         <p:style>
           <a:lnRef idx="1">
@@ -3554,7 +3123,7 @@
           <a:fillRef idx="3">
             <a:schemeClr val="accent1"/>
           </a:fillRef>
-          <a:effectRef idx="2">
+          <a:effectRef idx="0">
             <a:schemeClr val="accent1"/>
           </a:effectRef>
           <a:fontRef idx="minor">
@@ -3566,20 +3135,19 @@
           <a:lstStyle/>
           <a:p>
             <a:pPr algn="ctr"/>
-            <a:endParaRPr/>
-          </a:p>
-        </p:txBody>
-      </p:sp>
-      <p:sp>
-        <p:nvSpPr>
-          <p:cNvPr id="3" name="TextBox 2"/>
+          </a:p>
+        </p:txBody>
+      </p:sp>
+      <p:sp>
+        <p:nvSpPr>
+          <p:cNvPr id="3" name="Title"/>
           <p:cNvSpPr txBox="1"/>
           <p:nvPr/>
         </p:nvSpPr>
         <p:spPr>
           <a:xfrm>
-            <a:off x="432054" y="432054"/>
-            <a:ext cx="11327892" cy="558800"/>
+            <a:off x="257175" y="38100"/>
+            <a:ext cx="11677650" cy="666750"/>
           </a:xfrm>
           <a:prstGeom prst="rect">
             <a:avLst/>
@@ -3587,8 +3155,8 @@
           <a:noFill/>
         </p:spPr>
         <p:txBody>
-          <a:bodyPr wrap="square" lIns="19050" tIns="0" rIns="19050" bIns="0">
-            <a:noAutofit/>
+          <a:bodyPr wrap="square" lIns="19050" rIns="19050" tIns="0" bIns="0">
+            <a:spAutoFit/>
           </a:bodyPr>
           <a:lstStyle/>
           <a:p>
@@ -3599,39 +3167,30 @@
               <a:spcAft>
                 <a:spcPts val="800"/>
               </a:spcAft>
-              <a:defRPr sz="3000" b="1">
+            </a:pPr>
+            <a:r>
+              <a:rPr sz="3000" b="1">
                 <a:solidFill>
                   <a:srgbClr val="FFFFFF"/>
                 </a:solidFill>
-                <a:latin typeface="맑은 고딕"/>
-              </a:defRPr>
-            </a:pPr>
-            <a:r>
-              <a:rPr lang="en-US" altLang="ko-KR"/>
-              <a:t>[</a:t>
-            </a:r>
-            <a:r>
-              <a:rPr lang="ko-KR" altLang="en-US"/>
-              <a:t>이미지와 설명</a:t>
-            </a:r>
-            <a:r>
-              <a:rPr lang="en-US" altLang="ko-KR"/>
-              <a:t>]</a:t>
-            </a:r>
-            <a:endParaRPr/>
-          </a:p>
-        </p:txBody>
-      </p:sp>
-      <p:sp>
-        <p:nvSpPr>
-          <p:cNvPr id="4" name="TextBox 3"/>
+                <a:latin typeface="Pretendard"/>
+                <a:ea typeface="Pretendard"/>
+              </a:rPr>
+              <a:t>[이미지와 설명]</a:t>
+            </a:r>
+          </a:p>
+        </p:txBody>
+      </p:sp>
+      <p:sp>
+        <p:nvSpPr>
+          <p:cNvPr id="4" name="Page"/>
           <p:cNvSpPr txBox="1"/>
           <p:nvPr/>
         </p:nvSpPr>
         <p:spPr>
           <a:xfrm>
-            <a:off x="432054" y="6197346"/>
-            <a:ext cx="1016000" cy="228600"/>
+            <a:off x="247650" y="6553200"/>
+            <a:ext cx="1016000" cy="279400"/>
           </a:xfrm>
           <a:prstGeom prst="rect">
             <a:avLst/>
@@ -3639,8 +3198,8 @@
           <a:noFill/>
         </p:spPr>
         <p:txBody>
-          <a:bodyPr wrap="square" lIns="19050" tIns="0" rIns="19050" bIns="0">
-            <a:noAutofit/>
+          <a:bodyPr wrap="square" lIns="19050" rIns="19050" tIns="0" bIns="0">
+            <a:spAutoFit/>
           </a:bodyPr>
           <a:lstStyle/>
           <a:p>
@@ -3651,31 +3210,30 @@
               <a:spcAft>
                 <a:spcPts val="800"/>
               </a:spcAft>
-              <a:defRPr sz="1125" b="0">
+            </a:pPr>
+            <a:r>
+              <a:rPr sz="1128" b="1">
                 <a:solidFill>
                   <a:srgbClr val="777777"/>
                 </a:solidFill>
-                <a:latin typeface="맑은 고딕"/>
-              </a:defRPr>
-            </a:pPr>
-            <a:r>
-              <a:rPr lang="en-US" altLang="ko-KR"/>
+                <a:latin typeface="Pretendard"/>
+                <a:ea typeface="Pretendard"/>
+              </a:rPr>
               <a:t>05</a:t>
             </a:r>
-            <a:endParaRPr/>
-          </a:p>
-        </p:txBody>
-      </p:sp>
-      <p:sp>
-        <p:nvSpPr>
-          <p:cNvPr id="5" name="TextBox 4"/>
+          </a:p>
+        </p:txBody>
+      </p:sp>
+      <p:sp>
+        <p:nvSpPr>
+          <p:cNvPr id="5" name="Logo"/>
           <p:cNvSpPr txBox="1"/>
           <p:nvPr/>
         </p:nvSpPr>
         <p:spPr>
           <a:xfrm>
-            <a:off x="10540746" y="6006845"/>
-            <a:ext cx="1219200" cy="419100"/>
+            <a:off x="11163300" y="6413500"/>
+            <a:ext cx="1028700" cy="444500"/>
           </a:xfrm>
           <a:prstGeom prst="rect">
             <a:avLst/>
@@ -3683,8 +3241,8 @@
           <a:noFill/>
         </p:spPr>
         <p:txBody>
-          <a:bodyPr wrap="square" lIns="19050" tIns="0" rIns="19050" bIns="0">
-            <a:noAutofit/>
+          <a:bodyPr wrap="square" lIns="19050" rIns="19050" tIns="0" bIns="0">
+            <a:spAutoFit/>
           </a:bodyPr>
           <a:lstStyle/>
           <a:p>
@@ -3692,33 +3250,80 @@
               <a:lnSpc>
                 <a:spcPct val="130000"/>
               </a:lnSpc>
-              <a:defRPr sz="2250" b="1">
+              <a:spcAft>
+                <a:spcPts val="800"/>
+              </a:spcAft>
+            </a:pPr>
+            <a:r>
+              <a:rPr sz="2258" b="1">
                 <a:solidFill>
                   <a:srgbClr val="BE1551"/>
                 </a:solidFill>
-                <a:latin typeface="Arial"/>
-              </a:defRPr>
+                <a:latin typeface="Pretendard"/>
+                <a:ea typeface="Pretendard"/>
+              </a:rPr>
+              <a:t>CBNU</a:t>
+            </a:r>
+          </a:p>
+        </p:txBody>
+      </p:sp>
+      <p:sp>
+        <p:nvSpPr>
+          <p:cNvPr id="6" name="ImageSlot"/>
+          <p:cNvSpPr txBox="1"/>
+          <p:nvPr/>
+        </p:nvSpPr>
+        <p:spPr>
+          <a:xfrm>
+            <a:off x="342900" y="1238250"/>
+            <a:ext cx="5334000" cy="4857750"/>
+          </a:xfrm>
+          <a:prstGeom prst="rect">
+            <a:avLst/>
+          </a:prstGeom>
+          <a:noFill/>
+        </p:spPr>
+        <p:txBody>
+          <a:bodyPr wrap="square" lIns="19050" rIns="19050" tIns="0" bIns="0">
+            <a:spAutoFit/>
+          </a:bodyPr>
+          <a:lstStyle/>
+          <a:p>
+            <a:pPr algn="ctr">
+              <a:lnSpc>
+                <a:spcPct val="130000"/>
+              </a:lnSpc>
+              <a:spcAft>
+                <a:spcPts val="800"/>
+              </a:spcAft>
             </a:pPr>
             <a:r>
-              <a:t>CBNU</a:t>
-            </a:r>
-          </a:p>
-        </p:txBody>
-      </p:sp>
-      <p:sp>
-        <p:nvSpPr>
-          <p:cNvPr id="7" name="Rounded Rectangle 6"/>
+              <a:rPr sz="1600" b="1">
+                <a:solidFill>
+                  <a:srgbClr val="080808"/>
+                </a:solidFill>
+                <a:latin typeface="Pretendard"/>
+                <a:ea typeface="Pretendard"/>
+              </a:rPr>
+              <a:t>이미지 영역</a:t>
+            </a:r>
+          </a:p>
+        </p:txBody>
+      </p:sp>
+      <p:sp>
+        <p:nvSpPr>
+          <p:cNvPr id="7" name="Panel"/>
           <p:cNvSpPr/>
           <p:nvPr/>
         </p:nvSpPr>
         <p:spPr>
           <a:xfrm>
-            <a:off x="6121400" y="1447800"/>
-            <a:ext cx="5638546" cy="4368800"/>
+            <a:off x="6115050" y="1266825"/>
+            <a:ext cx="5715000" cy="4857750"/>
           </a:xfrm>
           <a:prstGeom prst="roundRect">
             <a:avLst>
-              <a:gd name="adj" fmla="val 5000"/>
+              <a:gd name="adj" fmla="val 6000"/>
             </a:avLst>
           </a:prstGeom>
           <a:solidFill>
@@ -3727,6 +3332,13 @@
           <a:ln>
             <a:noFill/>
           </a:ln>
+          <a:effectLst>
+            <a:outerShdw blurRad="38100" dist="19050" dir="5400000" algn="ctr" rotWithShape="0">
+              <a:srgbClr val="000000">
+                <a:alpha val="33000"/>
+              </a:srgbClr>
+            </a:outerShdw>
+          </a:effectLst>
         </p:spPr>
         <p:style>
           <a:lnRef idx="1">
@@ -3735,7 +3347,7 @@
           <a:fillRef idx="3">
             <a:schemeClr val="accent1"/>
           </a:fillRef>
-          <a:effectRef idx="2">
+          <a:effectRef idx="0">
             <a:schemeClr val="accent1"/>
           </a:effectRef>
           <a:fontRef idx="minor">
@@ -3747,20 +3359,19 @@
           <a:lstStyle/>
           <a:p>
             <a:pPr algn="ctr"/>
-            <a:endParaRPr/>
-          </a:p>
-        </p:txBody>
-      </p:sp>
-      <p:sp>
-        <p:nvSpPr>
-          <p:cNvPr id="8" name="Rectangle 7"/>
+          </a:p>
+        </p:txBody>
+      </p:sp>
+      <p:sp>
+        <p:nvSpPr>
+          <p:cNvPr id="8" name="PanelInterior"/>
           <p:cNvSpPr/>
           <p:nvPr/>
         </p:nvSpPr>
         <p:spPr>
           <a:xfrm>
-            <a:off x="6197600" y="1968500"/>
-            <a:ext cx="5486146" cy="3771900"/>
+            <a:off x="6267450" y="1781175"/>
+            <a:ext cx="5410200" cy="4191000"/>
           </a:xfrm>
           <a:prstGeom prst="rect">
             <a:avLst/>
@@ -3771,6 +3382,7 @@
           <a:ln>
             <a:noFill/>
           </a:ln>
+          <a:effectLst/>
         </p:spPr>
         <p:style>
           <a:lnRef idx="1">
@@ -3779,7 +3391,7 @@
           <a:fillRef idx="3">
             <a:schemeClr val="accent1"/>
           </a:fillRef>
-          <a:effectRef idx="2">
+          <a:effectRef idx="0">
             <a:schemeClr val="accent1"/>
           </a:effectRef>
           <a:fontRef idx="minor">
@@ -3791,20 +3403,19 @@
           <a:lstStyle/>
           <a:p>
             <a:pPr algn="ctr"/>
-            <a:endParaRPr/>
-          </a:p>
-        </p:txBody>
-      </p:sp>
-      <p:sp>
-        <p:nvSpPr>
-          <p:cNvPr id="9" name="TextBox 8"/>
+          </a:p>
+        </p:txBody>
+      </p:sp>
+      <p:sp>
+        <p:nvSpPr>
+          <p:cNvPr id="9" name="PanelTitle"/>
           <p:cNvSpPr txBox="1"/>
           <p:nvPr/>
         </p:nvSpPr>
         <p:spPr>
           <a:xfrm>
-            <a:off x="6324600" y="1549400"/>
-            <a:ext cx="5232146" cy="381000"/>
+            <a:off x="6324600" y="1314450"/>
+            <a:ext cx="5257800" cy="381000"/>
           </a:xfrm>
           <a:prstGeom prst="rect">
             <a:avLst/>
@@ -3812,8 +3423,8 @@
           <a:noFill/>
         </p:spPr>
         <p:txBody>
-          <a:bodyPr wrap="square" lIns="19050" tIns="0" rIns="19050" bIns="0">
-            <a:noAutofit/>
+          <a:bodyPr wrap="square" lIns="19050" rIns="19050" tIns="0" bIns="0">
+            <a:spAutoFit/>
           </a:bodyPr>
           <a:lstStyle/>
           <a:p>
@@ -3824,39 +3435,30 @@
               <a:spcAft>
                 <a:spcPts val="800"/>
               </a:spcAft>
-              <a:defRPr sz="1725" b="1">
+            </a:pPr>
+            <a:r>
+              <a:rPr sz="1730" b="1">
                 <a:solidFill>
                   <a:srgbClr val="FFFFFF"/>
                 </a:solidFill>
-                <a:latin typeface="맑은 고딕"/>
-              </a:defRPr>
-            </a:pPr>
-            <a:r>
-              <a:rPr lang="en-US" altLang="ko-KR"/>
-              <a:t>• [</a:t>
-            </a:r>
-            <a:r>
-              <a:rPr lang="ko-KR" altLang="en-US"/>
-              <a:t>설명 제목</a:t>
-            </a:r>
-            <a:r>
-              <a:rPr lang="en-US" altLang="ko-KR"/>
-              <a:t>]</a:t>
-            </a:r>
-            <a:endParaRPr/>
-          </a:p>
-        </p:txBody>
-      </p:sp>
-      <p:sp>
-        <p:nvSpPr>
-          <p:cNvPr id="10" name="TextBox 9"/>
+                <a:latin typeface="Pretendard"/>
+                <a:ea typeface="Pretendard"/>
+              </a:rPr>
+              <a:t>• [설명 제목]</a:t>
+            </a:r>
+          </a:p>
+        </p:txBody>
+      </p:sp>
+      <p:sp>
+        <p:nvSpPr>
+          <p:cNvPr id="10" name="PanelBody"/>
           <p:cNvSpPr txBox="1"/>
           <p:nvPr/>
         </p:nvSpPr>
         <p:spPr>
           <a:xfrm>
-            <a:off x="6350000" y="2159000"/>
-            <a:ext cx="5206746" cy="3454400"/>
+            <a:off x="6419850" y="1933575"/>
+            <a:ext cx="5105400" cy="3886200"/>
           </a:xfrm>
           <a:prstGeom prst="rect">
             <a:avLst/>
@@ -3864,8 +3466,8 @@
           <a:noFill/>
         </p:spPr>
         <p:txBody>
-          <a:bodyPr wrap="square" lIns="19050" tIns="0" rIns="19050" bIns="0">
-            <a:noAutofit/>
+          <a:bodyPr wrap="square" lIns="19050" rIns="19050" tIns="0" bIns="0">
+            <a:spAutoFit/>
           </a:bodyPr>
           <a:lstStyle/>
           <a:p>
@@ -3876,176 +3478,41 @@
               <a:spcAft>
                 <a:spcPts val="800"/>
               </a:spcAft>
-              <a:defRPr sz="1575" b="1">
+            </a:pPr>
+            <a:r>
+              <a:rPr sz="1572" b="1">
                 <a:solidFill>
                   <a:srgbClr val="080808"/>
                 </a:solidFill>
-                <a:latin typeface="맑은 고딕"/>
-              </a:defRPr>
-            </a:pPr>
-            <a:r>
-              <a:rPr lang="en-US" altLang="ko-KR"/>
-              <a:t>• </a:t>
-            </a:r>
-            <a:r>
-              <a:rPr lang="ko-KR" altLang="en-US"/>
-              <a:t>이미지의 핵심 내용
-</a:t>
-            </a:r>
-            <a:r>
-              <a:rPr lang="en-US" altLang="ko-KR"/>
-              <a:t>• </a:t>
-            </a:r>
-            <a:r>
-              <a:rPr lang="ko-KR" altLang="en-US"/>
-              <a:t>자료에서 확인한 근거
-</a:t>
-            </a:r>
-            <a:r>
-              <a:rPr lang="en-US" altLang="ko-KR"/>
-              <a:t>• </a:t>
-            </a:r>
-            <a:r>
-              <a:rPr lang="ko-KR" altLang="en-US"/>
-              <a:t>필요한 해석과 설명</a:t>
-            </a:r>
-            <a:endParaRPr/>
-          </a:p>
-        </p:txBody>
-      </p:sp>
-      <p:sp>
-        <p:nvSpPr>
-          <p:cNvPr id="11" name="직사각형 10">
-            <a:extLst>
-              <a:ext uri="{FF2B5EF4-FFF2-40B4-BE49-F238E27FC236}">
-                <a16:creationId xmlns:a16="http://schemas.microsoft.com/office/drawing/2014/main" id="{82CF15BA-CE71-7627-DAD4-A2D7261C4697}"/>
-              </a:ext>
-            </a:extLst>
-          </p:cNvPr>
-          <p:cNvSpPr/>
-          <p:nvPr/>
-        </p:nvSpPr>
-        <p:spPr>
-          <a:xfrm>
-            <a:off x="432054" y="1854200"/>
-            <a:ext cx="5334000" cy="3556000"/>
-          </a:xfrm>
-          <a:prstGeom prst="rect">
-            <a:avLst/>
-          </a:prstGeom>
-          <a:gradFill flip="none" rotWithShape="1">
-            <a:gsLst>
-              <a:gs pos="0">
-                <a:srgbClr val="F5F5F5"/>
-              </a:gs>
-              <a:gs pos="100000">
-                <a:schemeClr val="accent1">
-                  <a:tint val="50000"/>
-                  <a:shade val="100000"/>
-                  <a:satMod val="350000"/>
-                </a:schemeClr>
-              </a:gs>
-            </a:gsLst>
-            <a:lin ang="16200000" scaled="0"/>
-            <a:tileRect/>
-          </a:gradFill>
-          <a:ln w="12700">
-            <a:solidFill>
-              <a:srgbClr val="999999"/>
-            </a:solidFill>
-          </a:ln>
-        </p:spPr>
-        <p:style>
-          <a:lnRef idx="1">
-            <a:schemeClr val="accent1"/>
-          </a:lnRef>
-          <a:fillRef idx="3">
-            <a:schemeClr val="accent1"/>
-          </a:fillRef>
-          <a:effectRef idx="2">
-            <a:schemeClr val="accent1"/>
-          </a:effectRef>
-          <a:fontRef idx="minor">
-            <a:schemeClr val="lt1"/>
-          </a:fontRef>
-        </p:style>
-        <p:txBody>
-          <a:bodyPr rtlCol="0" anchor="ctr">
-            <a:noAutofit/>
-          </a:bodyPr>
-          <a:lstStyle/>
-          <a:p>
-            <a:pPr algn="ctr">
-              <a:lnSpc>
-                <a:spcPct val="130000"/>
-              </a:lnSpc>
-            </a:pPr>
-            <a:r>
-              <a:rPr lang="ko-KR" altLang="en-US">
+                <a:latin typeface="Pretendard"/>
+                <a:ea typeface="Pretendard"/>
+              </a:rPr>
+              <a:t>• 이미지의 핵심 내용</a:t>
+            </a:r>
+            <a:br/>
+            <a:br/>
+            <a:r>
+              <a:rPr sz="1572" b="1">
                 <a:solidFill>
-                  <a:srgbClr val="444444"/>
+                  <a:srgbClr val="080808"/>
                 </a:solidFill>
-                <a:latin typeface="맑은 고딕" panose="020B0503020000020004" pitchFamily="50" charset="-127"/>
+                <a:latin typeface="Pretendard"/>
+                <a:ea typeface="Pretendard"/>
               </a:rPr>
-              <a:t>이미지 영역</a:t>
-            </a:r>
-          </a:p>
-        </p:txBody>
-      </p:sp>
-      <p:sp>
-        <p:nvSpPr>
-          <p:cNvPr id="12" name="TextBox 11">
-            <a:extLst>
-              <a:ext uri="{FF2B5EF4-FFF2-40B4-BE49-F238E27FC236}">
-                <a16:creationId xmlns:a16="http://schemas.microsoft.com/office/drawing/2014/main" id="{29F02A09-8BA2-2273-24B0-9ACAD79A970F}"/>
-              </a:ext>
-            </a:extLst>
-          </p:cNvPr>
-          <p:cNvSpPr txBox="1"/>
-          <p:nvPr/>
-        </p:nvSpPr>
-        <p:spPr>
-          <a:xfrm>
-            <a:off x="432054" y="5562600"/>
-            <a:ext cx="5334000" cy="317500"/>
-          </a:xfrm>
-          <a:prstGeom prst="rect">
-            <a:avLst/>
-          </a:prstGeom>
-          <a:noFill/>
-        </p:spPr>
-        <p:txBody>
-          <a:bodyPr vert="horz" tIns="0" bIns="0" rtlCol="0">
-            <a:noAutofit/>
-          </a:bodyPr>
-          <a:lstStyle/>
-          <a:p>
-            <a:pPr algn="ctr">
-              <a:lnSpc>
-                <a:spcPct val="130000"/>
-              </a:lnSpc>
-            </a:pPr>
-            <a:r>
-              <a:rPr lang="en-US" altLang="ko-KR" sz="1600">
-                <a:latin typeface="맑은 고딕" panose="020B0503020000020004" pitchFamily="50" charset="-127"/>
+              <a:t>• 측정 결과</a:t>
+            </a:r>
+            <a:br/>
+            <a:br/>
+            <a:r>
+              <a:rPr sz="1572" b="1">
+                <a:solidFill>
+                  <a:srgbClr val="080808"/>
+                </a:solidFill>
+                <a:latin typeface="Pretendard"/>
+                <a:ea typeface="Pretendard"/>
               </a:rPr>
-              <a:t>[</a:t>
-            </a:r>
-            <a:r>
-              <a:rPr lang="ko-KR" altLang="en-US" sz="1600">
-                <a:latin typeface="맑은 고딕" panose="020B0503020000020004" pitchFamily="50" charset="-127"/>
-              </a:rPr>
-              <a:t>이미지 캡션</a:t>
-            </a:r>
-            <a:r>
-              <a:rPr lang="en-US" altLang="ko-KR" sz="1600">
-                <a:latin typeface="맑은 고딕" panose="020B0503020000020004" pitchFamily="50" charset="-127"/>
-              </a:rPr>
-              <a:t>]</a:t>
-            </a:r>
-            <a:endParaRPr lang="ko-KR" altLang="en-US" sz="1600">
-              <a:latin typeface="맑은 고딕" panose="020B0503020000020004" pitchFamily="50" charset="-127"/>
-            </a:endParaRPr>
+              <a:t>• 필요한 해석</a:t>
+            </a:r>
           </a:p>
         </p:txBody>
       </p:sp>
@@ -4375,319 +3842,4 @@
   </a:objectDefaults>
   <a:extraClrSchemeLst/>
 </a:theme>
-</file>
-
-<file path=ppt/theme/theme2.xml><?xml version="1.0" encoding="utf-8"?>
-<a:theme xmlns:a="http://schemas.openxmlformats.org/drawingml/2006/main" name="Office 테마">
-  <a:themeElements>
-    <a:clrScheme name="Office">
-      <a:dk1>
-        <a:sysClr val="windowText" lastClr="000000"/>
-      </a:dk1>
-      <a:lt1>
-        <a:sysClr val="window" lastClr="FFFFFF"/>
-      </a:lt1>
-      <a:dk2>
-        <a:srgbClr val="0E2841"/>
-      </a:dk2>
-      <a:lt2>
-        <a:srgbClr val="E8E8E8"/>
-      </a:lt2>
-      <a:accent1>
-        <a:srgbClr val="156082"/>
-      </a:accent1>
-      <a:accent2>
-        <a:srgbClr val="E97132"/>
-      </a:accent2>
-      <a:accent3>
-        <a:srgbClr val="196B24"/>
-      </a:accent3>
-      <a:accent4>
-        <a:srgbClr val="0F9ED5"/>
-      </a:accent4>
-      <a:accent5>
-        <a:srgbClr val="A02B93"/>
-      </a:accent5>
-      <a:accent6>
-        <a:srgbClr val="4EA72E"/>
-      </a:accent6>
-      <a:hlink>
-        <a:srgbClr val="467886"/>
-      </a:hlink>
-      <a:folHlink>
-        <a:srgbClr val="96607D"/>
-      </a:folHlink>
-    </a:clrScheme>
-    <a:fontScheme name="Office">
-      <a:majorFont>
-        <a:latin typeface="맑은 고딕" panose="02110004020202020204"/>
-        <a:ea typeface=""/>
-        <a:cs typeface=""/>
-        <a:font script="Jpan" typeface="游ゴシック Light"/>
-        <a:font script="Hang" typeface="맑은 고딕"/>
-        <a:font script="Hans" typeface="等线 Light"/>
-        <a:font script="Hant" typeface="新細明體"/>
-        <a:font script="Arab" typeface="Times New Roman"/>
-        <a:font script="Hebr" typeface="Times New Roman"/>
-        <a:font script="Thai" typeface="Angsana New"/>
-        <a:font script="Ethi" typeface="Nyala"/>
-        <a:font script="Beng" typeface="Vrinda"/>
-        <a:font script="Gujr" typeface="Shruti"/>
-        <a:font script="Khmr" typeface="MoolBoran"/>
-        <a:font script="Knda" typeface="Tunga"/>
-        <a:font script="Guru" typeface="Raavi"/>
-        <a:font script="Cans" typeface="Euphemia"/>
-        <a:font script="Cher" typeface="Plantagenet Cherokee"/>
-        <a:font script="Yiii" typeface="Microsoft Yi Baiti"/>
-        <a:font script="Tibt" typeface="Microsoft Himalaya"/>
-        <a:font script="Thaa" typeface="MV Boli"/>
-        <a:font script="Deva" typeface="Mangal"/>
-        <a:font script="Telu" typeface="Gautami"/>
-        <a:font script="Taml" typeface="Latha"/>
-        <a:font script="Syrc" typeface="Estrangelo Edessa"/>
-        <a:font script="Orya" typeface="Kalinga"/>
-        <a:font script="Mlym" typeface="Kartika"/>
-        <a:font script="Laoo" typeface="DokChampa"/>
-        <a:font script="Sinh" typeface="Iskoola Pota"/>
-        <a:font script="Mong" typeface="Mongolian Baiti"/>
-        <a:font script="Viet" typeface="Times New Roman"/>
-        <a:font script="Uigh" typeface="Microsoft Uighur"/>
-        <a:font script="Geor" typeface="Sylfaen"/>
-        <a:font script="Armn" typeface="Arial"/>
-        <a:font script="Bugi" typeface="Leelawadee UI"/>
-        <a:font script="Bopo" typeface="Microsoft JhengHei"/>
-        <a:font script="Java" typeface="Javanese Text"/>
-        <a:font script="Lisu" typeface="Segoe UI"/>
-        <a:font script="Mymr" typeface="Myanmar Text"/>
-        <a:font script="Nkoo" typeface="Ebrima"/>
-        <a:font script="Olck" typeface="Nirmala UI"/>
-        <a:font script="Osma" typeface="Ebrima"/>
-        <a:font script="Phag" typeface="Phagspa"/>
-        <a:font script="Syrn" typeface="Estrangelo Edessa"/>
-        <a:font script="Syrj" typeface="Estrangelo Edessa"/>
-        <a:font script="Syre" typeface="Estrangelo Edessa"/>
-        <a:font script="Sora" typeface="Nirmala UI"/>
-        <a:font script="Tale" typeface="Microsoft Tai Le"/>
-        <a:font script="Talu" typeface="Microsoft New Tai Lue"/>
-        <a:font script="Tfng" typeface="Ebrima"/>
-      </a:majorFont>
-      <a:minorFont>
-        <a:latin typeface="맑은 고딕" panose="02110004020202020204"/>
-        <a:ea typeface=""/>
-        <a:cs typeface=""/>
-        <a:font script="Jpan" typeface="游ゴシック"/>
-        <a:font script="Hang" typeface="맑은 고딕"/>
-        <a:font script="Hans" typeface="等线"/>
-        <a:font script="Hant" typeface="新細明體"/>
-        <a:font script="Arab" typeface="Arial"/>
-        <a:font script="Hebr" typeface="Arial"/>
-        <a:font script="Thai" typeface="Cordia New"/>
-        <a:font script="Ethi" typeface="Nyala"/>
-        <a:font script="Beng" typeface="Vrinda"/>
-        <a:font script="Gujr" typeface="Shruti"/>
-        <a:font script="Khmr" typeface="DaunPenh"/>
-        <a:font script="Knda" typeface="Tunga"/>
-        <a:font script="Guru" typeface="Raavi"/>
-        <a:font script="Cans" typeface="Euphemia"/>
-        <a:font script="Cher" typeface="Plantagenet Cherokee"/>
-        <a:font script="Yiii" typeface="Microsoft Yi Baiti"/>
-        <a:font script="Tibt" typeface="Microsoft Himalaya"/>
-        <a:font script="Thaa" typeface="MV Boli"/>
-        <a:font script="Deva" typeface="Mangal"/>
-        <a:font script="Telu" typeface="Gautami"/>
-        <a:font script="Taml" typeface="Latha"/>
-        <a:font script="Syrc" typeface="Estrangelo Edessa"/>
-        <a:font script="Orya" typeface="Kalinga"/>
-        <a:font script="Mlym" typeface="Kartika"/>
-        <a:font script="Laoo" typeface="DokChampa"/>
-        <a:font script="Sinh" typeface="Iskoola Pota"/>
-        <a:font script="Mong" typeface="Mongolian Baiti"/>
-        <a:font script="Viet" typeface="Arial"/>
-        <a:font script="Uigh" typeface="Microsoft Uighur"/>
-        <a:font script="Geor" typeface="Sylfaen"/>
-        <a:font script="Armn" typeface="Arial"/>
-        <a:font script="Bugi" typeface="Leelawadee UI"/>
-        <a:font script="Bopo" typeface="Microsoft JhengHei"/>
-        <a:font script="Java" typeface="Javanese Text"/>
-        <a:font script="Lisu" typeface="Segoe UI"/>
-        <a:font script="Mymr" typeface="Myanmar Text"/>
-        <a:font script="Nkoo" typeface="Ebrima"/>
-        <a:font script="Olck" typeface="Nirmala UI"/>
-        <a:font script="Osma" typeface="Ebrima"/>
-        <a:font script="Phag" typeface="Phagspa"/>
-        <a:font script="Syrn" typeface="Estrangelo Edessa"/>
-        <a:font script="Syrj" typeface="Estrangelo Edessa"/>
-        <a:font script="Syre" typeface="Estrangelo Edessa"/>
-        <a:font script="Sora" typeface="Nirmala UI"/>
-        <a:font script="Tale" typeface="Microsoft Tai Le"/>
-        <a:font script="Talu" typeface="Microsoft New Tai Lue"/>
-        <a:font script="Tfng" typeface="Ebrima"/>
-      </a:minorFont>
-    </a:fontScheme>
-    <a:fmtScheme name="Office">
-      <a:fillStyleLst>
-        <a:solidFill>
-          <a:schemeClr val="phClr"/>
-        </a:solidFill>
-        <a:gradFill rotWithShape="1">
-          <a:gsLst>
-            <a:gs pos="0">
-              <a:schemeClr val="phClr">
-                <a:lumMod val="110000"/>
-                <a:satMod val="105000"/>
-                <a:tint val="67000"/>
-              </a:schemeClr>
-            </a:gs>
-            <a:gs pos="50000">
-              <a:schemeClr val="phClr">
-                <a:lumMod val="105000"/>
-                <a:satMod val="103000"/>
-                <a:tint val="73000"/>
-              </a:schemeClr>
-            </a:gs>
-            <a:gs pos="100000">
-              <a:schemeClr val="phClr">
-                <a:lumMod val="105000"/>
-                <a:satMod val="109000"/>
-                <a:tint val="81000"/>
-              </a:schemeClr>
-            </a:gs>
-          </a:gsLst>
-          <a:lin ang="5400000" scaled="0"/>
-        </a:gradFill>
-        <a:gradFill rotWithShape="1">
-          <a:gsLst>
-            <a:gs pos="0">
-              <a:schemeClr val="phClr">
-                <a:satMod val="103000"/>
-                <a:lumMod val="102000"/>
-                <a:tint val="94000"/>
-              </a:schemeClr>
-            </a:gs>
-            <a:gs pos="50000">
-              <a:schemeClr val="phClr">
-                <a:satMod val="110000"/>
-                <a:lumMod val="100000"/>
-                <a:shade val="100000"/>
-              </a:schemeClr>
-            </a:gs>
-            <a:gs pos="100000">
-              <a:schemeClr val="phClr">
-                <a:lumMod val="99000"/>
-                <a:satMod val="120000"/>
-                <a:shade val="78000"/>
-              </a:schemeClr>
-            </a:gs>
-          </a:gsLst>
-          <a:lin ang="5400000" scaled="0"/>
-        </a:gradFill>
-      </a:fillStyleLst>
-      <a:lnStyleLst>
-        <a:ln w="12700" cap="flat" cmpd="sng" algn="ctr">
-          <a:solidFill>
-            <a:schemeClr val="phClr"/>
-          </a:solidFill>
-          <a:prstDash val="solid"/>
-          <a:miter lim="800000"/>
-        </a:ln>
-        <a:ln w="19050" cap="flat" cmpd="sng" algn="ctr">
-          <a:solidFill>
-            <a:schemeClr val="phClr"/>
-          </a:solidFill>
-          <a:prstDash val="solid"/>
-          <a:miter lim="800000"/>
-        </a:ln>
-        <a:ln w="25400" cap="flat" cmpd="sng" algn="ctr">
-          <a:solidFill>
-            <a:schemeClr val="phClr"/>
-          </a:solidFill>
-          <a:prstDash val="solid"/>
-          <a:miter lim="800000"/>
-        </a:ln>
-      </a:lnStyleLst>
-      <a:effectStyleLst>
-        <a:effectStyle>
-          <a:effectLst/>
-        </a:effectStyle>
-        <a:effectStyle>
-          <a:effectLst/>
-        </a:effectStyle>
-        <a:effectStyle>
-          <a:effectLst>
-            <a:outerShdw blurRad="57150" dist="19050" dir="5400000" algn="ctr" rotWithShape="0">
-              <a:srgbClr val="000000">
-                <a:alpha val="63000"/>
-              </a:srgbClr>
-            </a:outerShdw>
-          </a:effectLst>
-        </a:effectStyle>
-      </a:effectStyleLst>
-      <a:bgFillStyleLst>
-        <a:solidFill>
-          <a:schemeClr val="phClr"/>
-        </a:solidFill>
-        <a:solidFill>
-          <a:schemeClr val="phClr">
-            <a:tint val="95000"/>
-            <a:satMod val="170000"/>
-          </a:schemeClr>
-        </a:solidFill>
-        <a:gradFill rotWithShape="1">
-          <a:gsLst>
-            <a:gs pos="0">
-              <a:schemeClr val="phClr">
-                <a:tint val="93000"/>
-                <a:satMod val="150000"/>
-                <a:shade val="98000"/>
-                <a:lumMod val="102000"/>
-              </a:schemeClr>
-            </a:gs>
-            <a:gs pos="50000">
-              <a:schemeClr val="phClr">
-                <a:tint val="98000"/>
-                <a:satMod val="130000"/>
-                <a:shade val="90000"/>
-                <a:lumMod val="103000"/>
-              </a:schemeClr>
-            </a:gs>
-            <a:gs pos="100000">
-              <a:schemeClr val="phClr">
-                <a:shade val="63000"/>
-                <a:satMod val="120000"/>
-              </a:schemeClr>
-            </a:gs>
-          </a:gsLst>
-          <a:lin ang="5400000" scaled="0"/>
-        </a:gradFill>
-      </a:bgFillStyleLst>
-    </a:fmtScheme>
-  </a:themeElements>
-  <a:objectDefaults>
-    <a:lnDef>
-      <a:spPr/>
-      <a:bodyPr/>
-      <a:lstStyle/>
-      <a:style>
-        <a:lnRef idx="2">
-          <a:schemeClr val="accent1"/>
-        </a:lnRef>
-        <a:fillRef idx="0">
-          <a:schemeClr val="accent1"/>
-        </a:fillRef>
-        <a:effectRef idx="1">
-          <a:schemeClr val="accent1"/>
-        </a:effectRef>
-        <a:fontRef idx="minor">
-          <a:schemeClr val="tx1"/>
-        </a:fontRef>
-      </a:style>
-    </a:lnDef>
-  </a:objectDefaults>
-  <a:extraClrSchemeLst/>
-  <a:extLst>
-    <a:ext uri="{05A4C25C-085E-4340-85A3-A5531E510DB2}">
-      <thm15:themeFamily xmlns:thm15="http://schemas.microsoft.com/office/thememl/2012/main" name="Office Theme" id="{2E142A2C-CD16-42D6-873A-C26D2A0506FA}" vid="{1BDDFF52-6CD6-40A5-AB3C-68EB2F1E4D0A}"/>
-    </a:ext>
-  </a:extLst>
-</a:theme>
 </file>